--- a/Presentation (1).pptx
+++ b/Presentation (1).pptx
@@ -284,7 +284,7 @@
           <a:p>
             <a:fld id="{48A87A34-81AB-432B-8DAE-1953F412C126}" type="datetimeFigureOut">
               <a:rPr lang="en-US" dirty="0"/>
-              <a:t>6/19/2026</a:t>
+              <a:t>6/22/2026</a:t>
             </a:fld>
             <a:endParaRPr lang="en-US" dirty="0"/>
           </a:p>
@@ -591,7 +591,7 @@
           <a:p>
             <a:fld id="{48A87A34-81AB-432B-8DAE-1953F412C126}" type="datetimeFigureOut">
               <a:rPr lang="en-US" dirty="0"/>
-              <a:t>6/19/2026</a:t>
+              <a:t>6/22/2026</a:t>
             </a:fld>
             <a:endParaRPr lang="en-US" dirty="0"/>
           </a:p>
@@ -808,7 +808,7 @@
           <a:p>
             <a:fld id="{48A87A34-81AB-432B-8DAE-1953F412C126}" type="datetimeFigureOut">
               <a:rPr lang="en-US" dirty="0"/>
-              <a:t>6/19/2026</a:t>
+              <a:t>6/22/2026</a:t>
             </a:fld>
             <a:endParaRPr lang="en-US" dirty="0"/>
           </a:p>
@@ -1094,7 +1094,7 @@
           <a:p>
             <a:fld id="{48A87A34-81AB-432B-8DAE-1953F412C126}" type="datetimeFigureOut">
               <a:rPr lang="en-US" dirty="0"/>
-              <a:t>6/19/2026</a:t>
+              <a:t>6/22/2026</a:t>
             </a:fld>
             <a:endParaRPr lang="en-US" dirty="0"/>
           </a:p>
@@ -1543,7 +1543,7 @@
           <a:p>
             <a:fld id="{48A87A34-81AB-432B-8DAE-1953F412C126}" type="datetimeFigureOut">
               <a:rPr lang="en-US" dirty="0"/>
-              <a:t>6/19/2026</a:t>
+              <a:t>6/22/2026</a:t>
             </a:fld>
             <a:endParaRPr lang="en-US" dirty="0"/>
           </a:p>
@@ -2114,7 +2114,7 @@
           <a:p>
             <a:fld id="{48A87A34-81AB-432B-8DAE-1953F412C126}" type="datetimeFigureOut">
               <a:rPr lang="en-US" dirty="0"/>
-              <a:t>6/19/2026</a:t>
+              <a:t>6/22/2026</a:t>
             </a:fld>
             <a:endParaRPr lang="en-US" dirty="0"/>
           </a:p>
@@ -2961,7 +2961,7 @@
           <a:p>
             <a:fld id="{48A87A34-81AB-432B-8DAE-1953F412C126}" type="datetimeFigureOut">
               <a:rPr lang="en-US" dirty="0"/>
-              <a:t>6/19/2026</a:t>
+              <a:t>6/22/2026</a:t>
             </a:fld>
             <a:endParaRPr lang="en-US" dirty="0"/>
           </a:p>
@@ -3161,7 +3161,7 @@
           <a:p>
             <a:fld id="{48A87A34-81AB-432B-8DAE-1953F412C126}" type="datetimeFigureOut">
               <a:rPr lang="en-US" dirty="0"/>
-              <a:t>6/19/2026</a:t>
+              <a:t>6/22/2026</a:t>
             </a:fld>
             <a:endParaRPr lang="en-US" dirty="0"/>
           </a:p>
@@ -3370,7 +3370,7 @@
           <a:p>
             <a:fld id="{48A87A34-81AB-432B-8DAE-1953F412C126}" type="datetimeFigureOut">
               <a:rPr lang="en-US" dirty="0"/>
-              <a:t>6/19/2026</a:t>
+              <a:t>6/22/2026</a:t>
             </a:fld>
             <a:endParaRPr lang="en-US" dirty="0"/>
           </a:p>
@@ -3570,7 +3570,7 @@
           <a:p>
             <a:fld id="{48A87A34-81AB-432B-8DAE-1953F412C126}" type="datetimeFigureOut">
               <a:rPr lang="en-US" dirty="0"/>
-              <a:t>6/19/2026</a:t>
+              <a:t>6/22/2026</a:t>
             </a:fld>
             <a:endParaRPr lang="en-US" dirty="0"/>
           </a:p>
@@ -3845,7 +3845,7 @@
           <a:p>
             <a:fld id="{48A87A34-81AB-432B-8DAE-1953F412C126}" type="datetimeFigureOut">
               <a:rPr lang="en-US" dirty="0"/>
-              <a:t>6/19/2026</a:t>
+              <a:t>6/22/2026</a:t>
             </a:fld>
             <a:endParaRPr lang="en-US" dirty="0"/>
           </a:p>
@@ -4107,7 +4107,7 @@
           <a:p>
             <a:fld id="{48A87A34-81AB-432B-8DAE-1953F412C126}" type="datetimeFigureOut">
               <a:rPr lang="en-US" dirty="0"/>
-              <a:t>6/19/2026</a:t>
+              <a:t>6/22/2026</a:t>
             </a:fld>
             <a:endParaRPr lang="en-US" dirty="0"/>
           </a:p>
@@ -4517,7 +4517,7 @@
           <a:p>
             <a:fld id="{48A87A34-81AB-432B-8DAE-1953F412C126}" type="datetimeFigureOut">
               <a:rPr lang="en-US" dirty="0"/>
-              <a:t>6/19/2026</a:t>
+              <a:t>6/22/2026</a:t>
             </a:fld>
             <a:endParaRPr lang="en-US" dirty="0"/>
           </a:p>
@@ -4660,7 +4660,7 @@
           <a:p>
             <a:fld id="{48A87A34-81AB-432B-8DAE-1953F412C126}" type="datetimeFigureOut">
               <a:rPr lang="en-US" dirty="0"/>
-              <a:t>6/19/2026</a:t>
+              <a:t>6/22/2026</a:t>
             </a:fld>
             <a:endParaRPr lang="en-US" dirty="0"/>
           </a:p>
@@ -4780,7 +4780,7 @@
           <a:p>
             <a:fld id="{48A87A34-81AB-432B-8DAE-1953F412C126}" type="datetimeFigureOut">
               <a:rPr lang="en-US" dirty="0"/>
-              <a:t>6/19/2026</a:t>
+              <a:t>6/22/2026</a:t>
             </a:fld>
             <a:endParaRPr lang="en-US" dirty="0"/>
           </a:p>
@@ -5054,7 +5054,7 @@
           <a:p>
             <a:fld id="{48A87A34-81AB-432B-8DAE-1953F412C126}" type="datetimeFigureOut">
               <a:rPr lang="en-US" dirty="0"/>
-              <a:t>6/19/2026</a:t>
+              <a:t>6/22/2026</a:t>
             </a:fld>
             <a:endParaRPr lang="en-US" dirty="0"/>
           </a:p>
@@ -5361,7 +5361,7 @@
           <a:p>
             <a:fld id="{48A87A34-81AB-432B-8DAE-1953F412C126}" type="datetimeFigureOut">
               <a:rPr lang="en-US" dirty="0"/>
-              <a:t>6/19/2026</a:t>
+              <a:t>6/22/2026</a:t>
             </a:fld>
             <a:endParaRPr lang="en-US" dirty="0"/>
           </a:p>
@@ -5610,7 +5610,7 @@
             <a:fld id="{48A87A34-81AB-432B-8DAE-1953F412C126}" type="datetimeFigureOut">
               <a:rPr lang="en-US" dirty="0"/>
               <a:pPr/>
-              <a:t>6/19/2026</a:t>
+              <a:t>6/22/2026</a:t>
             </a:fld>
             <a:endParaRPr lang="en-US" dirty="0"/>
           </a:p>
@@ -6071,7 +6071,14 @@
           <a:bodyPr/>
           <a:lstStyle/>
           <a:p>
-            <a:endParaRPr lang="en-US"/>
+            <a:r>
+              <a:rPr lang="en-US" b="1" i="1" dirty="0"/>
+              <a:t>Text to html converter</a:t>
+            </a:r>
+            <a:br>
+              <a:rPr lang="en-US" dirty="0"/>
+            </a:br>
+            <a:endParaRPr lang="en-US" dirty="0"/>
           </a:p>
         </p:txBody>
       </p:sp>
@@ -6096,7 +6103,13 @@
           <a:bodyPr/>
           <a:lstStyle/>
           <a:p>
-            <a:endParaRPr lang="en-US"/>
+            <a:r>
+              <a:rPr lang="en-US" dirty="0"/>
+              <a:t>Mini project presentation on text to html converter</a:t>
+            </a:r>
+          </a:p>
+          <a:p>
+            <a:endParaRPr lang="en-US" dirty="0"/>
           </a:p>
         </p:txBody>
       </p:sp>
@@ -6152,8 +6165,12 @@
           <a:lstStyle/>
           <a:p>
             <a:r>
+              <a:rPr lang="en-US" b="1" i="1" dirty="0"/>
+              <a:t>INTRODUCTION</a:t>
+            </a:r>
+            <a:r>
               <a:rPr lang="en-US" dirty="0"/>
-              <a:t>INTRODUCTION </a:t>
+              <a:t> </a:t>
             </a:r>
           </a:p>
         </p:txBody>
@@ -6176,15 +6193,17 @@
         </p:nvSpPr>
         <p:spPr/>
         <p:txBody>
-          <a:bodyPr/>
+          <a:bodyPr>
+            <a:normAutofit/>
+          </a:bodyPr>
           <a:lstStyle/>
           <a:p>
             <a:pPr marL="0" indent="0">
               <a:buNone/>
             </a:pPr>
             <a:r>
-              <a:rPr lang="en-US" dirty="0"/>
-              <a:t>The Text to HTML Generator is a tool that converts plain text into HTML code automatically. It helps users create web content quickly without manually writing HTML tags.</a:t>
+              <a:rPr lang="en-US" sz="2800" cap="none" dirty="0"/>
+              <a:t>The text to HTML generator is a tool that converts plain text into HTML code automatically. It helps users create web content quickly without manually writing Html tags.</a:t>
             </a:r>
           </a:p>
         </p:txBody>
@@ -6241,8 +6260,20 @@
           <a:lstStyle/>
           <a:p>
             <a:r>
+              <a:rPr lang="en-US" b="1" i="1" dirty="0"/>
+              <a:t>Problem</a:t>
+            </a:r>
+            <a:r>
               <a:rPr lang="en-US" dirty="0"/>
-              <a:t>Problem statement </a:t>
+              <a:t> </a:t>
+            </a:r>
+            <a:r>
+              <a:rPr lang="en-US" b="1" i="1" dirty="0"/>
+              <a:t>statement</a:t>
+            </a:r>
+            <a:r>
+              <a:rPr lang="en-US" dirty="0"/>
+              <a:t> </a:t>
             </a:r>
           </a:p>
         </p:txBody>
@@ -6277,8 +6308,12 @@
               <a:buNone/>
             </a:pPr>
             <a:r>
-              <a:rPr lang="en-US" dirty="0"/>
-              <a:t>    Writing HTML code manually can be difficult for beginners and takes extra time for simple formatting tasks.</a:t>
+              <a:rPr lang="en-US" sz="3600" dirty="0"/>
+              <a:t>    </a:t>
+            </a:r>
+            <a:r>
+              <a:rPr lang="en-US" sz="3600" cap="none" dirty="0"/>
+              <a:t>Writing HTML code manually can be difficult for beginners and takes extra time for simple formatting tasks.</a:t>
             </a:r>
           </a:p>
           <a:p>
@@ -6341,7 +6376,7 @@
           <a:lstStyle/>
           <a:p>
             <a:r>
-              <a:rPr lang="en-US" dirty="0"/>
+              <a:rPr lang="en-US" b="1" i="1" dirty="0"/>
               <a:t>Objectives</a:t>
             </a:r>
           </a:p>
@@ -6363,7 +6398,12 @@
             <p:ph sz="quarter" idx="13"/>
           </p:nvPr>
         </p:nvSpPr>
-        <p:spPr/>
+        <p:spPr>
+          <a:xfrm>
+            <a:off x="1012097" y="2367092"/>
+            <a:ext cx="10363826" cy="3424107"/>
+          </a:xfrm>
+        </p:spPr>
         <p:txBody>
           <a:bodyPr/>
           <a:lstStyle/>
@@ -6372,11 +6412,11 @@
               <a:buNone/>
             </a:pPr>
             <a:r>
-              <a:rPr lang="en-US" dirty="0"/>
-              <a:t>1.Convert plain text into HTML format automatically.
-2.Reduce manual coding effort.
-3.Improve productivity and accuracy.
-4.Make web page creation easier for users.</a:t>
+              <a:rPr lang="en-US" cap="none" dirty="0"/>
+              <a:t>1.Convert Plain Text Into HTML Format Automatically.
+2.Reduce Manual Coding Effort.
+3.Improve Productivity And Accuracy.
+4.Make Web Page Creation Easier For Users.</a:t>
             </a:r>
           </a:p>
         </p:txBody>
@@ -6438,8 +6478,8 @@
           <a:lstStyle/>
           <a:p>
             <a:r>
-              <a:rPr lang="en-US" dirty="0"/>
-              <a:t>Methodology/ approach </a:t>
+              <a:rPr lang="en-US" i="1" dirty="0"/>
+              <a:t>Methodology</a:t>
             </a:r>
           </a:p>
         </p:txBody>
@@ -6460,10 +6500,15 @@
             <p:ph sz="quarter" idx="13"/>
           </p:nvPr>
         </p:nvSpPr>
-        <p:spPr/>
+        <p:spPr>
+          <a:xfrm>
+            <a:off x="1069840" y="1987135"/>
+            <a:ext cx="10363826" cy="3424107"/>
+          </a:xfrm>
+        </p:spPr>
         <p:txBody>
           <a:bodyPr>
-            <a:normAutofit fontScale="77500" lnSpcReduction="20000"/>
+            <a:normAutofit fontScale="32500" lnSpcReduction="20000"/>
           </a:bodyPr>
           <a:lstStyle/>
           <a:p>
@@ -6471,13 +6516,17 @@
               <a:buNone/>
             </a:pPr>
             <a:r>
-              <a:rPr lang="en-US" sz="2600" dirty="0"/>
-              <a:t>Technologies Used</a:t>
-            </a:r>
-            <a:r>
-              <a:rPr lang="en-US" dirty="0"/>
+              <a:rPr lang="en-US" sz="4900" b="1" cap="none" dirty="0"/>
+              <a:t>TECHNOLOGIES USED</a:t>
+            </a:r>
+            <a:r>
+              <a:rPr lang="en-US" cap="none" dirty="0"/>
               <a:t>
-1.HTML</a:t>
+</a:t>
+            </a:r>
+            <a:r>
+              <a:rPr lang="en-US" sz="4500" cap="none" dirty="0"/>
+              <a:t>1.Html</a:t>
             </a:r>
           </a:p>
           <a:p>
@@ -6485,22 +6534,30 @@
               <a:buNone/>
             </a:pPr>
             <a:r>
-              <a:rPr lang="en-US" dirty="0"/>
-              <a:t>2.python
+              <a:rPr lang="en-US" sz="4500" cap="none" dirty="0"/>
+              <a:t>2.Python</a:t>
+            </a:r>
+            <a:r>
+              <a:rPr lang="en-US" cap="none" dirty="0"/>
+              <a:t>
 </a:t>
             </a:r>
             <a:r>
-              <a:rPr lang="en-US" sz="2600" dirty="0"/>
-              <a:t>Working Process</a:t>
-            </a:r>
-            <a:r>
-              <a:rPr lang="en-US" dirty="0"/>
+              <a:rPr lang="en-US" sz="4900" b="1" cap="none" dirty="0"/>
+              <a:t>WORKING PROCESS</a:t>
+            </a:r>
+            <a:r>
+              <a:rPr lang="en-US" cap="none" dirty="0"/>
               <a:t>
-1.User enters text in the input box.
-2.The system reads the text.
-3.JavaScript converts the text into HTML tags.
-4.Generated HTML code is displayed along with preview.
-5.User can copy and use the HTML output.</a:t>
+</a:t>
+            </a:r>
+            <a:r>
+              <a:rPr lang="en-US" sz="5000" cap="none" dirty="0"/>
+              <a:t>1.User Enters Text In The Input Box.
+2.The System Reads The Text.
+3.Javascript Converts The Text Into HTML Tags.
+4.Generated HTML Code Is Displayed Along With Preview.
+5.User Can Copy And Use The HTML Output.</a:t>
             </a:r>
           </a:p>
         </p:txBody>
@@ -6557,8 +6614,8 @@
           <a:lstStyle/>
           <a:p>
             <a:r>
-              <a:rPr lang="en-US" dirty="0"/>
-              <a:t>Results/outcome </a:t>
+              <a:rPr lang="en-US" i="1" dirty="0"/>
+              <a:t>outcome </a:t>
             </a:r>
           </a:p>
         </p:txBody>
@@ -6649,7 +6706,7 @@
           <a:lstStyle/>
           <a:p>
             <a:r>
-              <a:rPr lang="en-US" dirty="0"/>
+              <a:rPr lang="en-US" i="1" dirty="0"/>
               <a:t>Conclusion </a:t>
             </a:r>
           </a:p>
@@ -6680,8 +6737,8 @@
               <a:buNone/>
             </a:pPr>
             <a:r>
-              <a:rPr lang="en-US" dirty="0"/>
-              <a:t>The Text to HTML Generator simplifies the process of creating HTML code from plain text. It is useful for students, beginners, and web developers who want to generate HTML quickly and efficiently.</a:t>
+              <a:rPr lang="en-US" cap="none" dirty="0"/>
+              <a:t>The Text To HTML Generator Simplifies The Process Of Creating HTML Code From Plain Text. It Is Useful For Students, Beginners, And Web Developers Who Want To Generate HTML Quickly And Efficiently.</a:t>
             </a:r>
           </a:p>
         </p:txBody>
